--- a/Report/Презентация УколовАП.pptx
+++ b/Report/Презентация УколовАП.pptx
@@ -116,7 +116,7 @@
   </p:defaultTextStyle>
   <p:extLst>
     <p:ext uri="{EFAFB233-063F-42B5-8137-9DF3F51BA10A}">
-      <p15:sldGuideLst xmlns="" xmlns:p15="http://schemas.microsoft.com/office/powerpoint/2012/main"/>
+      <p15:sldGuideLst xmlns:p15="http://schemas.microsoft.com/office/powerpoint/2012/main" xmlns=""/>
     </p:ext>
   </p:extLst>
 </p:presentation>
@@ -127,7 +127,7 @@
   <p:cmAuthor id="1" name="Кутульская Ева" initials="КЕ" lastIdx="1" clrIdx="0">
     <p:extLst>
       <p:ext uri="{19B8F6BF-5375-455C-9EA6-DF929625EA0E}">
-        <p15:presenceInfo xmlns="" xmlns:p15="http://schemas.microsoft.com/office/powerpoint/2012/main" userId="e78ce9aa2ff8bf6e" providerId="Windows Live"/>
+        <p15:presenceInfo xmlns:p15="http://schemas.microsoft.com/office/powerpoint/2012/main" xmlns="" userId="e78ce9aa2ff8bf6e" providerId="Windows Live"/>
       </p:ext>
     </p:extLst>
   </p:cmAuthor>
@@ -900,7 +900,7 @@
           <p:cNvPr id="7" name="Прямоугольник 6">
             <a:extLst>
               <a:ext uri="{FF2B5EF4-FFF2-40B4-BE49-F238E27FC236}">
-                <a16:creationId xmlns="" xmlns:a16="http://schemas.microsoft.com/office/drawing/2014/main" id="{949CBE03-2ADF-450F-9675-03EC256F65AF}"/>
+                <a16:creationId xmlns:a16="http://schemas.microsoft.com/office/drawing/2014/main" xmlns="" id="{949CBE03-2ADF-450F-9675-03EC256F65AF}"/>
               </a:ext>
             </a:extLst>
           </p:cNvPr>
@@ -955,7 +955,7 @@
           <p:cNvPr id="8" name="Прямоугольник 7">
             <a:extLst>
               <a:ext uri="{FF2B5EF4-FFF2-40B4-BE49-F238E27FC236}">
-                <a16:creationId xmlns="" xmlns:a16="http://schemas.microsoft.com/office/drawing/2014/main" id="{45FEC3FF-D2E9-481A-ACBC-53AC48521444}"/>
+                <a16:creationId xmlns:a16="http://schemas.microsoft.com/office/drawing/2014/main" xmlns="" id="{45FEC3FF-D2E9-481A-ACBC-53AC48521444}"/>
               </a:ext>
             </a:extLst>
           </p:cNvPr>
@@ -1264,7 +1264,7 @@
           <p:cNvPr id="7" name="Прямоугольник 6">
             <a:extLst>
               <a:ext uri="{FF2B5EF4-FFF2-40B4-BE49-F238E27FC236}">
-                <a16:creationId xmlns="" xmlns:a16="http://schemas.microsoft.com/office/drawing/2014/main" id="{541A6785-23BF-4FE0-B9C7-4E3C5F7F6B19}"/>
+                <a16:creationId xmlns:a16="http://schemas.microsoft.com/office/drawing/2014/main" xmlns="" id="{541A6785-23BF-4FE0-B9C7-4E3C5F7F6B19}"/>
               </a:ext>
             </a:extLst>
           </p:cNvPr>
@@ -1319,7 +1319,7 @@
           <p:cNvPr id="8" name="Овал 7">
             <a:extLst>
               <a:ext uri="{FF2B5EF4-FFF2-40B4-BE49-F238E27FC236}">
-                <a16:creationId xmlns="" xmlns:a16="http://schemas.microsoft.com/office/drawing/2014/main" id="{B394F0B6-9856-44D2-9805-66B694DE2C26}"/>
+                <a16:creationId xmlns:a16="http://schemas.microsoft.com/office/drawing/2014/main" xmlns="" id="{B394F0B6-9856-44D2-9805-66B694DE2C26}"/>
               </a:ext>
             </a:extLst>
           </p:cNvPr>
@@ -1374,7 +1374,7 @@
           <p:cNvPr id="9" name="Овал 8">
             <a:extLst>
               <a:ext uri="{FF2B5EF4-FFF2-40B4-BE49-F238E27FC236}">
-                <a16:creationId xmlns="" xmlns:a16="http://schemas.microsoft.com/office/drawing/2014/main" id="{70D0A806-BB3B-4E85-8C57-B9B390906F6A}"/>
+                <a16:creationId xmlns:a16="http://schemas.microsoft.com/office/drawing/2014/main" xmlns="" id="{70D0A806-BB3B-4E85-8C57-B9B390906F6A}"/>
               </a:ext>
             </a:extLst>
           </p:cNvPr>
@@ -1429,7 +1429,7 @@
           <p:cNvPr id="10" name="Прямоугольник 9">
             <a:extLst>
               <a:ext uri="{FF2B5EF4-FFF2-40B4-BE49-F238E27FC236}">
-                <a16:creationId xmlns="" xmlns:a16="http://schemas.microsoft.com/office/drawing/2014/main" id="{FE49146E-E334-4E17-96BB-AEB6B0141397}"/>
+                <a16:creationId xmlns:a16="http://schemas.microsoft.com/office/drawing/2014/main" xmlns="" id="{FE49146E-E334-4E17-96BB-AEB6B0141397}"/>
               </a:ext>
             </a:extLst>
           </p:cNvPr>
@@ -4021,7 +4021,7 @@
             <a:hlinkClick r:id="rId13"/>
             <a:extLst>
               <a:ext uri="{FF2B5EF4-FFF2-40B4-BE49-F238E27FC236}">
-                <a16:creationId xmlns="" xmlns:a16="http://schemas.microsoft.com/office/drawing/2014/main" id="{A3D3FC47-1965-4ADE-8DCB-5A97BFA1FA8D}"/>
+                <a16:creationId xmlns:a16="http://schemas.microsoft.com/office/drawing/2014/main" xmlns="" id="{A3D3FC47-1965-4ADE-8DCB-5A97BFA1FA8D}"/>
               </a:ext>
             </a:extLst>
           </p:cNvPr>
@@ -4034,7 +4034,7 @@
           <a:blip r:embed="rId14">
             <a:extLst>
               <a:ext uri="{28A0092B-C50C-407E-A947-70E740481C1C}">
-                <a14:useLocalDpi xmlns="" xmlns:a14="http://schemas.microsoft.com/office/drawing/2010/main" val="0"/>
+                <a14:useLocalDpi xmlns:a14="http://schemas.microsoft.com/office/drawing/2010/main" xmlns="" val="0"/>
               </a:ext>
             </a:extLst>
           </a:blip>
@@ -4387,7 +4387,7 @@
           <p:cNvPr id="8" name="TextBox 7">
             <a:extLst>
               <a:ext uri="{FF2B5EF4-FFF2-40B4-BE49-F238E27FC236}">
-                <a16:creationId xmlns="" xmlns:a16="http://schemas.microsoft.com/office/drawing/2014/main" id="{7D09C11F-D77B-563E-6964-5FC1BF2685BC}"/>
+                <a16:creationId xmlns:a16="http://schemas.microsoft.com/office/drawing/2014/main" xmlns="" id="{7D09C11F-D77B-563E-6964-5FC1BF2685BC}"/>
               </a:ext>
             </a:extLst>
           </p:cNvPr>
@@ -4397,7 +4397,7 @@
         <p:spPr>
           <a:xfrm>
             <a:off x="4291780" y="2344995"/>
-            <a:ext cx="6901385" cy="1446550"/>
+            <a:ext cx="6901385" cy="2123658"/>
           </a:xfrm>
           <a:prstGeom prst="rect">
             <a:avLst/>
@@ -4412,23 +4412,23 @@
           <a:p>
             <a:r>
               <a:rPr lang="ru-RU" sz="4400" b="1" dirty="0" smtClean="0"/>
-              <a:t>Разработка </a:t>
-            </a:r>
-            <a:r>
-              <a:rPr lang="ru-RU" sz="4400" b="1" dirty="0" smtClean="0"/>
-              <a:t>игры в жанре 2</a:t>
-            </a:r>
-            <a:r>
-              <a:rPr lang="en-US" sz="4400" b="1" dirty="0" smtClean="0"/>
-              <a:t>D</a:t>
-            </a:r>
-            <a:r>
-              <a:rPr lang="ru-RU" sz="4400" b="1" dirty="0" smtClean="0"/>
-              <a:t>-</a:t>
+              <a:t>Разработка игры в </a:t>
             </a:r>
             <a:r>
               <a:rPr lang="ru-RU" sz="4400" b="1" dirty="0" err="1" smtClean="0"/>
               <a:t>платформера</a:t>
+            </a:r>
+            <a:r>
+              <a:rPr lang="ru-RU" sz="4400" b="1" dirty="0" smtClean="0"/>
+              <a:t> «</a:t>
+            </a:r>
+            <a:r>
+              <a:rPr lang="ru-RU" sz="4400" b="1" dirty="0" err="1" smtClean="0"/>
+              <a:t>Африка.Возвращение</a:t>
+            </a:r>
+            <a:r>
+              <a:rPr lang="ru-RU" sz="4400" b="1" dirty="0" smtClean="0"/>
+              <a:t>»</a:t>
             </a:r>
             <a:endParaRPr lang="ru-RU" sz="4400" dirty="0"/>
           </a:p>
@@ -4439,7 +4439,7 @@
           <p:cNvPr id="9" name="TextBox 8">
             <a:extLst>
               <a:ext uri="{FF2B5EF4-FFF2-40B4-BE49-F238E27FC236}">
-                <a16:creationId xmlns="" xmlns:a16="http://schemas.microsoft.com/office/drawing/2014/main" id="{9E36671C-13B7-58DD-3A5A-C1F5BA7A4908}"/>
+                <a16:creationId xmlns:a16="http://schemas.microsoft.com/office/drawing/2014/main" xmlns="" id="{9E36671C-13B7-58DD-3A5A-C1F5BA7A4908}"/>
               </a:ext>
             </a:extLst>
           </p:cNvPr>
@@ -4478,21 +4478,7 @@
                 <a:latin typeface="Times New Roman" panose="02020603050405020304" pitchFamily="18" charset="0"/>
                 <a:cs typeface="Times New Roman" panose="02020603050405020304" pitchFamily="18" charset="0"/>
               </a:rPr>
-              <a:t>Уколов </a:t>
-            </a:r>
-            <a:r>
-              <a:rPr lang="ru-RU" dirty="0" smtClean="0">
-                <a:latin typeface="Times New Roman" panose="02020603050405020304" pitchFamily="18" charset="0"/>
-                <a:cs typeface="Times New Roman" panose="02020603050405020304" pitchFamily="18" charset="0"/>
-              </a:rPr>
-              <a:t>Александр </a:t>
-            </a:r>
-            <a:r>
-              <a:rPr lang="ru-RU" dirty="0" smtClean="0">
-                <a:latin typeface="Times New Roman" panose="02020603050405020304" pitchFamily="18" charset="0"/>
-                <a:cs typeface="Times New Roman" panose="02020603050405020304" pitchFamily="18" charset="0"/>
-              </a:rPr>
-              <a:t>Петрович</a:t>
+              <a:t>Уколов Александр Петрович</a:t>
             </a:r>
             <a:endParaRPr lang="ru-RU" sz="1800" dirty="0">
               <a:latin typeface="Times New Roman" panose="02020603050405020304" pitchFamily="18" charset="0"/>
@@ -4506,7 +4492,7 @@
           <p:cNvPr id="12" name="TextBox 11">
             <a:extLst>
               <a:ext uri="{FF2B5EF4-FFF2-40B4-BE49-F238E27FC236}">
-                <a16:creationId xmlns="" xmlns:a16="http://schemas.microsoft.com/office/drawing/2014/main" id="{6858A18E-CD5A-BE31-DF1E-4AD9799B5A76}"/>
+                <a16:creationId xmlns:a16="http://schemas.microsoft.com/office/drawing/2014/main" xmlns="" id="{6858A18E-CD5A-BE31-DF1E-4AD9799B5A76}"/>
               </a:ext>
             </a:extLst>
           </p:cNvPr>
@@ -4553,7 +4539,7 @@
     </p:spTree>
     <p:extLst>
       <p:ext uri="{BB962C8B-B14F-4D97-AF65-F5344CB8AC3E}">
-        <p14:creationId xmlns="" xmlns:p14="http://schemas.microsoft.com/office/powerpoint/2010/main" val="1744775643"/>
+        <p14:creationId xmlns:p14="http://schemas.microsoft.com/office/powerpoint/2010/main" xmlns="" val="1744775643"/>
       </p:ext>
     </p:extLst>
   </p:cSld>
@@ -4561,7 +4547,7 @@
     <a:masterClrMapping/>
   </p:clrMapOvr>
   <mc:AlternateContent xmlns:mc="http://schemas.openxmlformats.org/markup-compatibility/2006">
-    <mc:Choice xmlns="" xmlns:p14="http://schemas.microsoft.com/office/powerpoint/2010/main" Requires="p14">
+    <mc:Choice xmlns:p14="http://schemas.microsoft.com/office/powerpoint/2010/main" xmlns="" Requires="p14">
       <p:transition spd="med" p14:dur="700">
         <p:fade/>
       </p:transition>
@@ -4770,7 +4756,7 @@
     <a:masterClrMapping/>
   </p:clrMapOvr>
   <mc:AlternateContent xmlns:mc="http://schemas.openxmlformats.org/markup-compatibility/2006">
-    <mc:Choice xmlns="" xmlns:p14="http://schemas.microsoft.com/office/powerpoint/2010/main" Requires="p14">
+    <mc:Choice xmlns:p14="http://schemas.microsoft.com/office/powerpoint/2010/main" xmlns="" Requires="p14">
       <p:transition spd="med" p14:dur="700">
         <p:fade/>
       </p:transition>
@@ -4888,7 +4874,7 @@
     <a:masterClrMapping/>
   </p:clrMapOvr>
   <mc:AlternateContent xmlns:mc="http://schemas.openxmlformats.org/markup-compatibility/2006">
-    <mc:Choice xmlns="" xmlns:p14="http://schemas.microsoft.com/office/powerpoint/2010/main" Requires="p14">
+    <mc:Choice xmlns:p14="http://schemas.microsoft.com/office/powerpoint/2010/main" xmlns="" Requires="p14">
       <p:transition spd="med" p14:dur="700">
         <p:fade/>
       </p:transition>
@@ -4931,7 +4917,7 @@
           <p:cNvPr id="2" name="Заголовок 1">
             <a:extLst>
               <a:ext uri="{FF2B5EF4-FFF2-40B4-BE49-F238E27FC236}">
-                <a16:creationId xmlns="" xmlns:a16="http://schemas.microsoft.com/office/drawing/2014/main" id="{F7CC7DC2-12CF-4928-A4E4-8D979EAE3E6D}"/>
+                <a16:creationId xmlns:a16="http://schemas.microsoft.com/office/drawing/2014/main" xmlns="" id="{F7CC7DC2-12CF-4928-A4E4-8D979EAE3E6D}"/>
               </a:ext>
             </a:extLst>
           </p:cNvPr>
@@ -4958,14 +4944,7 @@
                 <a:latin typeface="Times New Roman" pitchFamily="18" charset="0"/>
                 <a:cs typeface="Times New Roman" pitchFamily="18" charset="0"/>
               </a:rPr>
-              <a:t>Ц</a:t>
-            </a:r>
-            <a:r>
-              <a:rPr lang="ru-RU" b="1" dirty="0" smtClean="0">
-                <a:latin typeface="Times New Roman" pitchFamily="18" charset="0"/>
-                <a:cs typeface="Times New Roman" pitchFamily="18" charset="0"/>
-              </a:rPr>
-              <a:t>ель проекта</a:t>
+              <a:t>Цель проекта</a:t>
             </a:r>
             <a:endParaRPr lang="ru-RU" b="1" dirty="0">
               <a:latin typeface="Times New Roman" pitchFamily="18" charset="0"/>
@@ -4979,7 +4958,7 @@
           <p:cNvPr id="3" name="Объект 2">
             <a:extLst>
               <a:ext uri="{FF2B5EF4-FFF2-40B4-BE49-F238E27FC236}">
-                <a16:creationId xmlns="" xmlns:a16="http://schemas.microsoft.com/office/drawing/2014/main" id="{17E72134-208E-4A25-B10D-1D5493B35925}"/>
+                <a16:creationId xmlns:a16="http://schemas.microsoft.com/office/drawing/2014/main" xmlns="" id="{17E72134-208E-4A25-B10D-1D5493B35925}"/>
               </a:ext>
             </a:extLst>
           </p:cNvPr>
@@ -5057,7 +5036,7 @@
     </p:spTree>
     <p:extLst>
       <p:ext uri="{BB962C8B-B14F-4D97-AF65-F5344CB8AC3E}">
-        <p14:creationId xmlns="" xmlns:p14="http://schemas.microsoft.com/office/powerpoint/2010/main" val="3693504918"/>
+        <p14:creationId xmlns:p14="http://schemas.microsoft.com/office/powerpoint/2010/main" xmlns="" val="3693504918"/>
       </p:ext>
     </p:extLst>
   </p:cSld>
@@ -5065,7 +5044,7 @@
     <a:masterClrMapping/>
   </p:clrMapOvr>
   <mc:AlternateContent xmlns:mc="http://schemas.openxmlformats.org/markup-compatibility/2006">
-    <mc:Choice xmlns="" xmlns:p14="http://schemas.microsoft.com/office/powerpoint/2010/main" Requires="p14">
+    <mc:Choice xmlns:p14="http://schemas.microsoft.com/office/powerpoint/2010/main" xmlns="" Requires="p14">
       <p:transition spd="med" p14:dur="700">
         <p:fade/>
       </p:transition>
@@ -5108,7 +5087,7 @@
           <p:cNvPr id="2" name="Заголовок 1">
             <a:extLst>
               <a:ext uri="{FF2B5EF4-FFF2-40B4-BE49-F238E27FC236}">
-                <a16:creationId xmlns="" xmlns:a16="http://schemas.microsoft.com/office/drawing/2014/main" id="{F7FEA663-ED93-415C-AE74-0ADE94E33926}"/>
+                <a16:creationId xmlns:a16="http://schemas.microsoft.com/office/drawing/2014/main" xmlns="" id="{F7FEA663-ED93-415C-AE74-0ADE94E33926}"/>
               </a:ext>
             </a:extLst>
           </p:cNvPr>
@@ -5241,7 +5220,7 @@
     </p:spTree>
     <p:extLst>
       <p:ext uri="{BB962C8B-B14F-4D97-AF65-F5344CB8AC3E}">
-        <p14:creationId xmlns="" xmlns:p14="http://schemas.microsoft.com/office/powerpoint/2010/main" val="2054120658"/>
+        <p14:creationId xmlns:p14="http://schemas.microsoft.com/office/powerpoint/2010/main" xmlns="" val="2054120658"/>
       </p:ext>
     </p:extLst>
   </p:cSld>
@@ -5249,7 +5228,7 @@
     <a:masterClrMapping/>
   </p:clrMapOvr>
   <mc:AlternateContent xmlns:mc="http://schemas.openxmlformats.org/markup-compatibility/2006">
-    <mc:Choice xmlns="" xmlns:p14="http://schemas.microsoft.com/office/powerpoint/2010/main" Requires="p14">
+    <mc:Choice xmlns:p14="http://schemas.microsoft.com/office/powerpoint/2010/main" xmlns="" Requires="p14">
       <p:transition spd="med" p14:dur="700">
         <p:fade/>
       </p:transition>
@@ -5292,7 +5271,7 @@
           <p:cNvPr id="2" name="Заголовок 1">
             <a:extLst>
               <a:ext uri="{FF2B5EF4-FFF2-40B4-BE49-F238E27FC236}">
-                <a16:creationId xmlns="" xmlns:a16="http://schemas.microsoft.com/office/drawing/2014/main" id="{F7FEA663-ED93-415C-AE74-0ADE94E33926}"/>
+                <a16:creationId xmlns:a16="http://schemas.microsoft.com/office/drawing/2014/main" xmlns="" id="{F7FEA663-ED93-415C-AE74-0ADE94E33926}"/>
               </a:ext>
             </a:extLst>
           </p:cNvPr>
@@ -5547,7 +5526,7 @@
     </p:spTree>
     <p:extLst>
       <p:ext uri="{BB962C8B-B14F-4D97-AF65-F5344CB8AC3E}">
-        <p14:creationId xmlns="" xmlns:p14="http://schemas.microsoft.com/office/powerpoint/2010/main" val="2054120658"/>
+        <p14:creationId xmlns:p14="http://schemas.microsoft.com/office/powerpoint/2010/main" xmlns="" val="2054120658"/>
       </p:ext>
     </p:extLst>
   </p:cSld>
@@ -5555,7 +5534,7 @@
     <a:masterClrMapping/>
   </p:clrMapOvr>
   <mc:AlternateContent xmlns:mc="http://schemas.openxmlformats.org/markup-compatibility/2006">
-    <mc:Choice xmlns="" xmlns:p14="http://schemas.microsoft.com/office/powerpoint/2010/main" Requires="p14">
+    <mc:Choice xmlns:p14="http://schemas.microsoft.com/office/powerpoint/2010/main" xmlns="" Requires="p14">
       <p:transition spd="med" p14:dur="700">
         <p:fade/>
       </p:transition>
@@ -5849,7 +5828,7 @@
     <a:masterClrMapping/>
   </p:clrMapOvr>
   <mc:AlternateContent xmlns:mc="http://schemas.openxmlformats.org/markup-compatibility/2006">
-    <mc:Choice xmlns="" xmlns:p14="http://schemas.microsoft.com/office/powerpoint/2010/main" Requires="p14">
+    <mc:Choice xmlns:p14="http://schemas.microsoft.com/office/powerpoint/2010/main" xmlns="" Requires="p14">
       <p:transition spd="med" p14:dur="700">
         <p:fade/>
       </p:transition>
@@ -6025,7 +6004,7 @@
     <a:masterClrMapping/>
   </p:clrMapOvr>
   <mc:AlternateContent xmlns:mc="http://schemas.openxmlformats.org/markup-compatibility/2006">
-    <mc:Choice xmlns="" xmlns:p14="http://schemas.microsoft.com/office/powerpoint/2010/main" Requires="p14">
+    <mc:Choice xmlns:p14="http://schemas.microsoft.com/office/powerpoint/2010/main" xmlns="" Requires="p14">
       <p:transition spd="med" p14:dur="700">
         <p:fade/>
       </p:transition>
@@ -6219,7 +6198,7 @@
     <a:masterClrMapping/>
   </p:clrMapOvr>
   <mc:AlternateContent xmlns:mc="http://schemas.openxmlformats.org/markup-compatibility/2006">
-    <mc:Choice xmlns="" xmlns:p14="http://schemas.microsoft.com/office/powerpoint/2010/main" Requires="p14">
+    <mc:Choice xmlns:p14="http://schemas.microsoft.com/office/powerpoint/2010/main" xmlns="" Requires="p14">
       <p:transition spd="med" p14:dur="700">
         <p:fade/>
       </p:transition>
@@ -6373,7 +6352,7 @@
     <a:masterClrMapping/>
   </p:clrMapOvr>
   <mc:AlternateContent xmlns:mc="http://schemas.openxmlformats.org/markup-compatibility/2006">
-    <mc:Choice xmlns="" xmlns:p14="http://schemas.microsoft.com/office/powerpoint/2010/main" Requires="p14">
+    <mc:Choice xmlns:p14="http://schemas.microsoft.com/office/powerpoint/2010/main" xmlns="" Requires="p14">
       <p:transition spd="med" p14:dur="700">
         <p:fade/>
       </p:transition>
@@ -6570,7 +6549,7 @@
     <a:masterClrMapping/>
   </p:clrMapOvr>
   <mc:AlternateContent xmlns:mc="http://schemas.openxmlformats.org/markup-compatibility/2006">
-    <mc:Choice xmlns="" xmlns:p14="http://schemas.microsoft.com/office/powerpoint/2010/main" Requires="p14">
+    <mc:Choice xmlns:p14="http://schemas.microsoft.com/office/powerpoint/2010/main" xmlns="" Requires="p14">
       <p:transition spd="med" p14:dur="700">
         <p:fade/>
       </p:transition>

--- a/Report/Презентация УколовАП.pptx
+++ b/Report/Презентация УколовАП.pptx
@@ -116,7 +116,7 @@
   </p:defaultTextStyle>
   <p:extLst>
     <p:ext uri="{EFAFB233-063F-42B5-8137-9DF3F51BA10A}">
-      <p15:sldGuideLst xmlns:p15="http://schemas.microsoft.com/office/powerpoint/2012/main" xmlns=""/>
+      <p15:sldGuideLst xmlns="" xmlns:p15="http://schemas.microsoft.com/office/powerpoint/2012/main"/>
     </p:ext>
   </p:extLst>
 </p:presentation>
@@ -127,7 +127,7 @@
   <p:cmAuthor id="1" name="Кутульская Ева" initials="КЕ" lastIdx="1" clrIdx="0">
     <p:extLst>
       <p:ext uri="{19B8F6BF-5375-455C-9EA6-DF929625EA0E}">
-        <p15:presenceInfo xmlns:p15="http://schemas.microsoft.com/office/powerpoint/2012/main" xmlns="" userId="e78ce9aa2ff8bf6e" providerId="Windows Live"/>
+        <p15:presenceInfo xmlns="" xmlns:p15="http://schemas.microsoft.com/office/powerpoint/2012/main" userId="e78ce9aa2ff8bf6e" providerId="Windows Live"/>
       </p:ext>
     </p:extLst>
   </p:cmAuthor>
@@ -308,7 +308,7 @@
             <a:fld id="{0DCB5CFB-1053-4ABD-8AE7-93CBC6C0D1C1}" type="datetimeFigureOut">
               <a:rPr lang="ru-RU" smtClean="0"/>
               <a:pPr/>
-              <a:t>27.06.2025</a:t>
+              <a:t>30.06.2025</a:t>
             </a:fld>
             <a:endParaRPr lang="ru-RU"/>
           </a:p>
@@ -482,7 +482,7 @@
             <a:fld id="{0DCB5CFB-1053-4ABD-8AE7-93CBC6C0D1C1}" type="datetimeFigureOut">
               <a:rPr lang="ru-RU" smtClean="0"/>
               <a:pPr/>
-              <a:t>27.06.2025</a:t>
+              <a:t>30.06.2025</a:t>
             </a:fld>
             <a:endParaRPr lang="ru-RU"/>
           </a:p>
@@ -669,7 +669,7 @@
             <a:fld id="{0DCB5CFB-1053-4ABD-8AE7-93CBC6C0D1C1}" type="datetimeFigureOut">
               <a:rPr lang="ru-RU" smtClean="0"/>
               <a:pPr/>
-              <a:t>27.06.2025</a:t>
+              <a:t>30.06.2025</a:t>
             </a:fld>
             <a:endParaRPr lang="ru-RU"/>
           </a:p>
@@ -846,7 +846,7 @@
             <a:fld id="{0DCB5CFB-1053-4ABD-8AE7-93CBC6C0D1C1}" type="datetimeFigureOut">
               <a:rPr lang="ru-RU" smtClean="0"/>
               <a:pPr/>
-              <a:t>27.06.2025</a:t>
+              <a:t>30.06.2025</a:t>
             </a:fld>
             <a:endParaRPr lang="ru-RU"/>
           </a:p>
@@ -900,7 +900,7 @@
           <p:cNvPr id="7" name="Прямоугольник 6">
             <a:extLst>
               <a:ext uri="{FF2B5EF4-FFF2-40B4-BE49-F238E27FC236}">
-                <a16:creationId xmlns:a16="http://schemas.microsoft.com/office/drawing/2014/main" xmlns="" id="{949CBE03-2ADF-450F-9675-03EC256F65AF}"/>
+                <a16:creationId xmlns="" xmlns:a16="http://schemas.microsoft.com/office/drawing/2014/main" id="{949CBE03-2ADF-450F-9675-03EC256F65AF}"/>
               </a:ext>
             </a:extLst>
           </p:cNvPr>
@@ -955,7 +955,7 @@
           <p:cNvPr id="8" name="Прямоугольник 7">
             <a:extLst>
               <a:ext uri="{FF2B5EF4-FFF2-40B4-BE49-F238E27FC236}">
-                <a16:creationId xmlns:a16="http://schemas.microsoft.com/office/drawing/2014/main" xmlns="" id="{45FEC3FF-D2E9-481A-ACBC-53AC48521444}"/>
+                <a16:creationId xmlns="" xmlns:a16="http://schemas.microsoft.com/office/drawing/2014/main" id="{45FEC3FF-D2E9-481A-ACBC-53AC48521444}"/>
               </a:ext>
             </a:extLst>
           </p:cNvPr>
@@ -1210,7 +1210,7 @@
             <a:fld id="{0DCB5CFB-1053-4ABD-8AE7-93CBC6C0D1C1}" type="datetimeFigureOut">
               <a:rPr lang="ru-RU" smtClean="0"/>
               <a:pPr/>
-              <a:t>27.06.2025</a:t>
+              <a:t>30.06.2025</a:t>
             </a:fld>
             <a:endParaRPr lang="ru-RU"/>
           </a:p>
@@ -1264,7 +1264,7 @@
           <p:cNvPr id="7" name="Прямоугольник 6">
             <a:extLst>
               <a:ext uri="{FF2B5EF4-FFF2-40B4-BE49-F238E27FC236}">
-                <a16:creationId xmlns:a16="http://schemas.microsoft.com/office/drawing/2014/main" xmlns="" id="{541A6785-23BF-4FE0-B9C7-4E3C5F7F6B19}"/>
+                <a16:creationId xmlns="" xmlns:a16="http://schemas.microsoft.com/office/drawing/2014/main" id="{541A6785-23BF-4FE0-B9C7-4E3C5F7F6B19}"/>
               </a:ext>
             </a:extLst>
           </p:cNvPr>
@@ -1319,7 +1319,7 @@
           <p:cNvPr id="8" name="Овал 7">
             <a:extLst>
               <a:ext uri="{FF2B5EF4-FFF2-40B4-BE49-F238E27FC236}">
-                <a16:creationId xmlns:a16="http://schemas.microsoft.com/office/drawing/2014/main" xmlns="" id="{B394F0B6-9856-44D2-9805-66B694DE2C26}"/>
+                <a16:creationId xmlns="" xmlns:a16="http://schemas.microsoft.com/office/drawing/2014/main" id="{B394F0B6-9856-44D2-9805-66B694DE2C26}"/>
               </a:ext>
             </a:extLst>
           </p:cNvPr>
@@ -1374,7 +1374,7 @@
           <p:cNvPr id="9" name="Овал 8">
             <a:extLst>
               <a:ext uri="{FF2B5EF4-FFF2-40B4-BE49-F238E27FC236}">
-                <a16:creationId xmlns:a16="http://schemas.microsoft.com/office/drawing/2014/main" xmlns="" id="{70D0A806-BB3B-4E85-8C57-B9B390906F6A}"/>
+                <a16:creationId xmlns="" xmlns:a16="http://schemas.microsoft.com/office/drawing/2014/main" id="{70D0A806-BB3B-4E85-8C57-B9B390906F6A}"/>
               </a:ext>
             </a:extLst>
           </p:cNvPr>
@@ -1429,7 +1429,7 @@
           <p:cNvPr id="10" name="Прямоугольник 9">
             <a:extLst>
               <a:ext uri="{FF2B5EF4-FFF2-40B4-BE49-F238E27FC236}">
-                <a16:creationId xmlns:a16="http://schemas.microsoft.com/office/drawing/2014/main" xmlns="" id="{FE49146E-E334-4E17-96BB-AEB6B0141397}"/>
+                <a16:creationId xmlns="" xmlns:a16="http://schemas.microsoft.com/office/drawing/2014/main" id="{FE49146E-E334-4E17-96BB-AEB6B0141397}"/>
               </a:ext>
             </a:extLst>
           </p:cNvPr>
@@ -1706,7 +1706,7 @@
             <a:fld id="{0DCB5CFB-1053-4ABD-8AE7-93CBC6C0D1C1}" type="datetimeFigureOut">
               <a:rPr lang="ru-RU" smtClean="0"/>
               <a:pPr/>
-              <a:t>27.06.2025</a:t>
+              <a:t>30.06.2025</a:t>
             </a:fld>
             <a:endParaRPr lang="ru-RU"/>
           </a:p>
@@ -2096,7 +2096,7 @@
             <a:fld id="{0DCB5CFB-1053-4ABD-8AE7-93CBC6C0D1C1}" type="datetimeFigureOut">
               <a:rPr lang="ru-RU" smtClean="0"/>
               <a:pPr/>
-              <a:t>27.06.2025</a:t>
+              <a:t>30.06.2025</a:t>
             </a:fld>
             <a:endParaRPr lang="ru-RU"/>
           </a:p>
@@ -2258,7 +2258,7 @@
             <a:fld id="{0DCB5CFB-1053-4ABD-8AE7-93CBC6C0D1C1}" type="datetimeFigureOut">
               <a:rPr lang="ru-RU" smtClean="0"/>
               <a:pPr/>
-              <a:t>27.06.2025</a:t>
+              <a:t>30.06.2025</a:t>
             </a:fld>
             <a:endParaRPr lang="ru-RU"/>
           </a:p>
@@ -2360,7 +2360,7 @@
             <a:fld id="{0DCB5CFB-1053-4ABD-8AE7-93CBC6C0D1C1}" type="datetimeFigureOut">
               <a:rPr lang="ru-RU" smtClean="0"/>
               <a:pPr/>
-              <a:t>27.06.2025</a:t>
+              <a:t>30.06.2025</a:t>
             </a:fld>
             <a:endParaRPr lang="ru-RU"/>
           </a:p>
@@ -2633,7 +2633,7 @@
             <a:fld id="{0DCB5CFB-1053-4ABD-8AE7-93CBC6C0D1C1}" type="datetimeFigureOut">
               <a:rPr lang="ru-RU" smtClean="0"/>
               <a:pPr/>
-              <a:t>27.06.2025</a:t>
+              <a:t>30.06.2025</a:t>
             </a:fld>
             <a:endParaRPr lang="ru-RU"/>
           </a:p>
@@ -2933,7 +2933,7 @@
             <a:fld id="{0DCB5CFB-1053-4ABD-8AE7-93CBC6C0D1C1}" type="datetimeFigureOut">
               <a:rPr lang="ru-RU" smtClean="0"/>
               <a:pPr/>
-              <a:t>27.06.2025</a:t>
+              <a:t>30.06.2025</a:t>
             </a:fld>
             <a:endParaRPr lang="ru-RU"/>
           </a:p>
@@ -3716,7 +3716,7 @@
             <a:fld id="{0DCB5CFB-1053-4ABD-8AE7-93CBC6C0D1C1}" type="datetimeFigureOut">
               <a:rPr lang="ru-RU" smtClean="0"/>
               <a:pPr/>
-              <a:t>27.06.2025</a:t>
+              <a:t>30.06.2025</a:t>
             </a:fld>
             <a:endParaRPr lang="ru-RU"/>
           </a:p>
@@ -4021,7 +4021,7 @@
             <a:hlinkClick r:id="rId13"/>
             <a:extLst>
               <a:ext uri="{FF2B5EF4-FFF2-40B4-BE49-F238E27FC236}">
-                <a16:creationId xmlns:a16="http://schemas.microsoft.com/office/drawing/2014/main" xmlns="" id="{A3D3FC47-1965-4ADE-8DCB-5A97BFA1FA8D}"/>
+                <a16:creationId xmlns="" xmlns:a16="http://schemas.microsoft.com/office/drawing/2014/main" id="{A3D3FC47-1965-4ADE-8DCB-5A97BFA1FA8D}"/>
               </a:ext>
             </a:extLst>
           </p:cNvPr>
@@ -4034,7 +4034,7 @@
           <a:blip r:embed="rId14">
             <a:extLst>
               <a:ext uri="{28A0092B-C50C-407E-A947-70E740481C1C}">
-                <a14:useLocalDpi xmlns:a14="http://schemas.microsoft.com/office/drawing/2010/main" xmlns="" val="0"/>
+                <a14:useLocalDpi xmlns="" xmlns:a14="http://schemas.microsoft.com/office/drawing/2010/main" val="0"/>
               </a:ext>
             </a:extLst>
           </a:blip>
@@ -4387,7 +4387,7 @@
           <p:cNvPr id="8" name="TextBox 7">
             <a:extLst>
               <a:ext uri="{FF2B5EF4-FFF2-40B4-BE49-F238E27FC236}">
-                <a16:creationId xmlns:a16="http://schemas.microsoft.com/office/drawing/2014/main" xmlns="" id="{7D09C11F-D77B-563E-6964-5FC1BF2685BC}"/>
+                <a16:creationId xmlns="" xmlns:a16="http://schemas.microsoft.com/office/drawing/2014/main" id="{7D09C11F-D77B-563E-6964-5FC1BF2685BC}"/>
               </a:ext>
             </a:extLst>
           </p:cNvPr>
@@ -4396,7 +4396,7 @@
         </p:nvSpPr>
         <p:spPr>
           <a:xfrm>
-            <a:off x="4291780" y="2344995"/>
+            <a:off x="4277925" y="1998631"/>
             <a:ext cx="6901385" cy="2123658"/>
           </a:xfrm>
           <a:prstGeom prst="rect">
@@ -4412,7 +4412,7 @@
           <a:p>
             <a:r>
               <a:rPr lang="ru-RU" sz="4400" b="1" dirty="0" smtClean="0"/>
-              <a:t>Разработка игры в </a:t>
+              <a:t>Разработка </a:t>
             </a:r>
             <a:r>
               <a:rPr lang="ru-RU" sz="4400" b="1" dirty="0" err="1" smtClean="0"/>
@@ -4420,7 +4420,11 @@
             </a:r>
             <a:r>
               <a:rPr lang="ru-RU" sz="4400" b="1" dirty="0" smtClean="0"/>
-              <a:t> «</a:t>
+              <a:t> </a:t>
+            </a:r>
+            <a:r>
+              <a:rPr lang="ru-RU" sz="4400" b="1" dirty="0" smtClean="0"/>
+              <a:t>«</a:t>
             </a:r>
             <a:r>
               <a:rPr lang="ru-RU" sz="4400" b="1" dirty="0" err="1" smtClean="0"/>
@@ -4439,7 +4443,7 @@
           <p:cNvPr id="9" name="TextBox 8">
             <a:extLst>
               <a:ext uri="{FF2B5EF4-FFF2-40B4-BE49-F238E27FC236}">
-                <a16:creationId xmlns:a16="http://schemas.microsoft.com/office/drawing/2014/main" xmlns="" id="{9E36671C-13B7-58DD-3A5A-C1F5BA7A4908}"/>
+                <a16:creationId xmlns="" xmlns:a16="http://schemas.microsoft.com/office/drawing/2014/main" id="{9E36671C-13B7-58DD-3A5A-C1F5BA7A4908}"/>
               </a:ext>
             </a:extLst>
           </p:cNvPr>
@@ -4492,7 +4496,7 @@
           <p:cNvPr id="12" name="TextBox 11">
             <a:extLst>
               <a:ext uri="{FF2B5EF4-FFF2-40B4-BE49-F238E27FC236}">
-                <a16:creationId xmlns:a16="http://schemas.microsoft.com/office/drawing/2014/main" xmlns="" id="{6858A18E-CD5A-BE31-DF1E-4AD9799B5A76}"/>
+                <a16:creationId xmlns="" xmlns:a16="http://schemas.microsoft.com/office/drawing/2014/main" id="{6858A18E-CD5A-BE31-DF1E-4AD9799B5A76}"/>
               </a:ext>
             </a:extLst>
           </p:cNvPr>
@@ -4539,7 +4543,7 @@
     </p:spTree>
     <p:extLst>
       <p:ext uri="{BB962C8B-B14F-4D97-AF65-F5344CB8AC3E}">
-        <p14:creationId xmlns:p14="http://schemas.microsoft.com/office/powerpoint/2010/main" xmlns="" val="1744775643"/>
+        <p14:creationId xmlns="" xmlns:p14="http://schemas.microsoft.com/office/powerpoint/2010/main" val="1744775643"/>
       </p:ext>
     </p:extLst>
   </p:cSld>
@@ -4547,7 +4551,7 @@
     <a:masterClrMapping/>
   </p:clrMapOvr>
   <mc:AlternateContent xmlns:mc="http://schemas.openxmlformats.org/markup-compatibility/2006">
-    <mc:Choice xmlns:p14="http://schemas.microsoft.com/office/powerpoint/2010/main" xmlns="" Requires="p14">
+    <mc:Choice xmlns="" xmlns:p14="http://schemas.microsoft.com/office/powerpoint/2010/main" Requires="p14">
       <p:transition spd="med" p14:dur="700">
         <p:fade/>
       </p:transition>
@@ -4756,7 +4760,7 @@
     <a:masterClrMapping/>
   </p:clrMapOvr>
   <mc:AlternateContent xmlns:mc="http://schemas.openxmlformats.org/markup-compatibility/2006">
-    <mc:Choice xmlns:p14="http://schemas.microsoft.com/office/powerpoint/2010/main" xmlns="" Requires="p14">
+    <mc:Choice xmlns="" xmlns:p14="http://schemas.microsoft.com/office/powerpoint/2010/main" Requires="p14">
       <p:transition spd="med" p14:dur="700">
         <p:fade/>
       </p:transition>
@@ -4874,7 +4878,7 @@
     <a:masterClrMapping/>
   </p:clrMapOvr>
   <mc:AlternateContent xmlns:mc="http://schemas.openxmlformats.org/markup-compatibility/2006">
-    <mc:Choice xmlns:p14="http://schemas.microsoft.com/office/powerpoint/2010/main" xmlns="" Requires="p14">
+    <mc:Choice xmlns="" xmlns:p14="http://schemas.microsoft.com/office/powerpoint/2010/main" Requires="p14">
       <p:transition spd="med" p14:dur="700">
         <p:fade/>
       </p:transition>
@@ -4917,7 +4921,7 @@
           <p:cNvPr id="2" name="Заголовок 1">
             <a:extLst>
               <a:ext uri="{FF2B5EF4-FFF2-40B4-BE49-F238E27FC236}">
-                <a16:creationId xmlns:a16="http://schemas.microsoft.com/office/drawing/2014/main" xmlns="" id="{F7CC7DC2-12CF-4928-A4E4-8D979EAE3E6D}"/>
+                <a16:creationId xmlns="" xmlns:a16="http://schemas.microsoft.com/office/drawing/2014/main" id="{F7CC7DC2-12CF-4928-A4E4-8D979EAE3E6D}"/>
               </a:ext>
             </a:extLst>
           </p:cNvPr>
@@ -4958,7 +4962,7 @@
           <p:cNvPr id="3" name="Объект 2">
             <a:extLst>
               <a:ext uri="{FF2B5EF4-FFF2-40B4-BE49-F238E27FC236}">
-                <a16:creationId xmlns:a16="http://schemas.microsoft.com/office/drawing/2014/main" xmlns="" id="{17E72134-208E-4A25-B10D-1D5493B35925}"/>
+                <a16:creationId xmlns="" xmlns:a16="http://schemas.microsoft.com/office/drawing/2014/main" id="{17E72134-208E-4A25-B10D-1D5493B35925}"/>
               </a:ext>
             </a:extLst>
           </p:cNvPr>
@@ -5036,7 +5040,7 @@
     </p:spTree>
     <p:extLst>
       <p:ext uri="{BB962C8B-B14F-4D97-AF65-F5344CB8AC3E}">
-        <p14:creationId xmlns:p14="http://schemas.microsoft.com/office/powerpoint/2010/main" xmlns="" val="3693504918"/>
+        <p14:creationId xmlns="" xmlns:p14="http://schemas.microsoft.com/office/powerpoint/2010/main" val="3693504918"/>
       </p:ext>
     </p:extLst>
   </p:cSld>
@@ -5044,7 +5048,7 @@
     <a:masterClrMapping/>
   </p:clrMapOvr>
   <mc:AlternateContent xmlns:mc="http://schemas.openxmlformats.org/markup-compatibility/2006">
-    <mc:Choice xmlns:p14="http://schemas.microsoft.com/office/powerpoint/2010/main" xmlns="" Requires="p14">
+    <mc:Choice xmlns="" xmlns:p14="http://schemas.microsoft.com/office/powerpoint/2010/main" Requires="p14">
       <p:transition spd="med" p14:dur="700">
         <p:fade/>
       </p:transition>
@@ -5087,7 +5091,7 @@
           <p:cNvPr id="2" name="Заголовок 1">
             <a:extLst>
               <a:ext uri="{FF2B5EF4-FFF2-40B4-BE49-F238E27FC236}">
-                <a16:creationId xmlns:a16="http://schemas.microsoft.com/office/drawing/2014/main" xmlns="" id="{F7FEA663-ED93-415C-AE74-0ADE94E33926}"/>
+                <a16:creationId xmlns="" xmlns:a16="http://schemas.microsoft.com/office/drawing/2014/main" id="{F7FEA663-ED93-415C-AE74-0ADE94E33926}"/>
               </a:ext>
             </a:extLst>
           </p:cNvPr>
@@ -5220,7 +5224,7 @@
     </p:spTree>
     <p:extLst>
       <p:ext uri="{BB962C8B-B14F-4D97-AF65-F5344CB8AC3E}">
-        <p14:creationId xmlns:p14="http://schemas.microsoft.com/office/powerpoint/2010/main" xmlns="" val="2054120658"/>
+        <p14:creationId xmlns="" xmlns:p14="http://schemas.microsoft.com/office/powerpoint/2010/main" val="2054120658"/>
       </p:ext>
     </p:extLst>
   </p:cSld>
@@ -5228,7 +5232,7 @@
     <a:masterClrMapping/>
   </p:clrMapOvr>
   <mc:AlternateContent xmlns:mc="http://schemas.openxmlformats.org/markup-compatibility/2006">
-    <mc:Choice xmlns:p14="http://schemas.microsoft.com/office/powerpoint/2010/main" xmlns="" Requires="p14">
+    <mc:Choice xmlns="" xmlns:p14="http://schemas.microsoft.com/office/powerpoint/2010/main" Requires="p14">
       <p:transition spd="med" p14:dur="700">
         <p:fade/>
       </p:transition>
@@ -5271,7 +5275,7 @@
           <p:cNvPr id="2" name="Заголовок 1">
             <a:extLst>
               <a:ext uri="{FF2B5EF4-FFF2-40B4-BE49-F238E27FC236}">
-                <a16:creationId xmlns:a16="http://schemas.microsoft.com/office/drawing/2014/main" xmlns="" id="{F7FEA663-ED93-415C-AE74-0ADE94E33926}"/>
+                <a16:creationId xmlns="" xmlns:a16="http://schemas.microsoft.com/office/drawing/2014/main" id="{F7FEA663-ED93-415C-AE74-0ADE94E33926}"/>
               </a:ext>
             </a:extLst>
           </p:cNvPr>
@@ -5526,7 +5530,7 @@
     </p:spTree>
     <p:extLst>
       <p:ext uri="{BB962C8B-B14F-4D97-AF65-F5344CB8AC3E}">
-        <p14:creationId xmlns:p14="http://schemas.microsoft.com/office/powerpoint/2010/main" xmlns="" val="2054120658"/>
+        <p14:creationId xmlns="" xmlns:p14="http://schemas.microsoft.com/office/powerpoint/2010/main" val="2054120658"/>
       </p:ext>
     </p:extLst>
   </p:cSld>
@@ -5534,7 +5538,7 @@
     <a:masterClrMapping/>
   </p:clrMapOvr>
   <mc:AlternateContent xmlns:mc="http://schemas.openxmlformats.org/markup-compatibility/2006">
-    <mc:Choice xmlns:p14="http://schemas.microsoft.com/office/powerpoint/2010/main" xmlns="" Requires="p14">
+    <mc:Choice xmlns="" xmlns:p14="http://schemas.microsoft.com/office/powerpoint/2010/main" Requires="p14">
       <p:transition spd="med" p14:dur="700">
         <p:fade/>
       </p:transition>
@@ -5828,7 +5832,7 @@
     <a:masterClrMapping/>
   </p:clrMapOvr>
   <mc:AlternateContent xmlns:mc="http://schemas.openxmlformats.org/markup-compatibility/2006">
-    <mc:Choice xmlns:p14="http://schemas.microsoft.com/office/powerpoint/2010/main" xmlns="" Requires="p14">
+    <mc:Choice xmlns="" xmlns:p14="http://schemas.microsoft.com/office/powerpoint/2010/main" Requires="p14">
       <p:transition spd="med" p14:dur="700">
         <p:fade/>
       </p:transition>
@@ -6004,7 +6008,7 @@
     <a:masterClrMapping/>
   </p:clrMapOvr>
   <mc:AlternateContent xmlns:mc="http://schemas.openxmlformats.org/markup-compatibility/2006">
-    <mc:Choice xmlns:p14="http://schemas.microsoft.com/office/powerpoint/2010/main" xmlns="" Requires="p14">
+    <mc:Choice xmlns="" xmlns:p14="http://schemas.microsoft.com/office/powerpoint/2010/main" Requires="p14">
       <p:transition spd="med" p14:dur="700">
         <p:fade/>
       </p:transition>
@@ -6198,7 +6202,7 @@
     <a:masterClrMapping/>
   </p:clrMapOvr>
   <mc:AlternateContent xmlns:mc="http://schemas.openxmlformats.org/markup-compatibility/2006">
-    <mc:Choice xmlns:p14="http://schemas.microsoft.com/office/powerpoint/2010/main" xmlns="" Requires="p14">
+    <mc:Choice xmlns="" xmlns:p14="http://schemas.microsoft.com/office/powerpoint/2010/main" Requires="p14">
       <p:transition spd="med" p14:dur="700">
         <p:fade/>
       </p:transition>
@@ -6352,7 +6356,7 @@
     <a:masterClrMapping/>
   </p:clrMapOvr>
   <mc:AlternateContent xmlns:mc="http://schemas.openxmlformats.org/markup-compatibility/2006">
-    <mc:Choice xmlns:p14="http://schemas.microsoft.com/office/powerpoint/2010/main" xmlns="" Requires="p14">
+    <mc:Choice xmlns="" xmlns:p14="http://schemas.microsoft.com/office/powerpoint/2010/main" Requires="p14">
       <p:transition spd="med" p14:dur="700">
         <p:fade/>
       </p:transition>
@@ -6549,7 +6553,7 @@
     <a:masterClrMapping/>
   </p:clrMapOvr>
   <mc:AlternateContent xmlns:mc="http://schemas.openxmlformats.org/markup-compatibility/2006">
-    <mc:Choice xmlns:p14="http://schemas.microsoft.com/office/powerpoint/2010/main" xmlns="" Requires="p14">
+    <mc:Choice xmlns="" xmlns:p14="http://schemas.microsoft.com/office/powerpoint/2010/main" Requires="p14">
       <p:transition spd="med" p14:dur="700">
         <p:fade/>
       </p:transition>
